--- a/blog-brief/회신-어쩌다보니최씨.pptx
+++ b/blog-brief/회신-어쩌다보니최씨.pptx
@@ -3185,7 +3185,7 @@
                   <a:srgbClr val="8B5E3C"/>
                 </a:solidFill>
               </a:rPr>
-              <a:t>3. 버튼 아이콘 6개 (../icons/)</a:t>
+              <a:t>3. 버튼 아이콘 6개 (icons/)</a:t>
             </a:r>
           </a:p>
         </p:txBody>

--- a/blog-brief/회신-어쩌다보니최씨.pptx
+++ b/blog-brief/회신-어쩌다보니최씨.pptx
@@ -2948,7 +2948,7 @@
                 <a:cs typeface="맑은 고딕" pitchFamily="34" charset="-120"/>
               </a:rPr>
               <a:t>로고·배경 일러스트·아이콘 6개 파일을 모두 첨부했습니다 (logo, hero-illustration, icons 폴더).
-"인프라 운영 이야기" / "사업관리 노트"는 실제 담당 업무(나이스 클라우드 운영사업 사업관리)를 반영한 이름입니다. 다른 이름이 좋으면 알려주세요.</a:t>
+categoryNo 6~11은 요청서에 적힌 순서를 그대로 확정해서 적용했습니다. 버튼 이름은 "인프라 운영 이야기" / "사업관리 노트"로 확정합니다 — 실제 담당 업무(나이스 클라우드 운영사업 사업관리)를 반영한 이름입니다.</a:t>
             </a:r>
             <a:endParaRPr lang="en-US" sz="1200" dirty="0"/>
           </a:p>
@@ -12429,7 +12429,7 @@
                 <a:ea typeface="맑은 고딕" pitchFamily="34" charset="-122"/>
                 <a:cs typeface="맑은 고딕" pitchFamily="34" charset="-120"/>
               </a:rPr>
-              <a:t>카테고리 번호는 요청서 순서를 그대로 따랐습니다. 실제 순서와 다르면 번호만 고쳐 알려주세요. 아이콘 6개는 icons/ 폴더로 별도 첨부했습니다.</a:t>
+              <a:t>카테고리 번호는 요청서 순서(6~11) 그대로 확정했습니다. 아이콘 6개는 icons/ 폴더로 첨부했습니다.</a:t>
             </a:r>
             <a:endParaRPr lang="en-US" sz="1100" dirty="0"/>
           </a:p>
